--- a/public/fun/cards/life/life-30.pptx
+++ b/public/fun/cards/life/life-30.pptx
@@ -3099,692 +3099,14 @@
       <p:grpSpPr/>
       <p:sp>
         <p:nvSpPr>
-          <p:cNvPr id="2" name="Oval 1"/>
-          <p:cNvSpPr/>
+          <p:cNvPr id="2" name="텍스트"/>
+          <p:cNvSpPr txBox="1"/>
           <p:nvPr/>
         </p:nvSpPr>
         <p:spPr>
           <a:xfrm>
-            <a:off x="2462400" y="158400"/>
-            <a:ext cx="43200" cy="43200"/>
-          </a:xfrm>
-          <a:prstGeom prst="ellipse">
-            <a:avLst/>
-          </a:prstGeom>
-          <a:solidFill>
-            <a:srgbClr val="C49645">
-              <a:alpha val="70000"/>
-            </a:srgbClr>
-          </a:solidFill>
-          <a:ln>
-            <a:noFill/>
-          </a:ln>
-        </p:spPr>
-        <p:txBody>
-          <a:bodyPr rtlCol="0" anchor="ctr"/>
-          <a:lstStyle/>
-          <a:p>
-            <a:pPr algn="ctr"/>
-          </a:p>
-        </p:txBody>
-      </p:sp>
-      <p:sp>
-        <p:nvSpPr>
-          <p:cNvPr id="3" name="Oval 2"/>
-          <p:cNvSpPr/>
-          <p:nvPr/>
-        </p:nvSpPr>
-        <p:spPr>
-          <a:xfrm>
-            <a:off x="2462400" y="266400"/>
-            <a:ext cx="43200" cy="43200"/>
-          </a:xfrm>
-          <a:prstGeom prst="ellipse">
-            <a:avLst/>
-          </a:prstGeom>
-          <a:solidFill>
-            <a:srgbClr val="C49645">
-              <a:alpha val="57999"/>
-            </a:srgbClr>
-          </a:solidFill>
-          <a:ln>
-            <a:noFill/>
-          </a:ln>
-        </p:spPr>
-        <p:txBody>
-          <a:bodyPr rtlCol="0" anchor="ctr"/>
-          <a:lstStyle/>
-          <a:p>
-            <a:pPr algn="ctr"/>
-          </a:p>
-        </p:txBody>
-      </p:sp>
-      <p:sp>
-        <p:nvSpPr>
-          <p:cNvPr id="4" name="Oval 3"/>
-          <p:cNvSpPr/>
-          <p:nvPr/>
-        </p:nvSpPr>
-        <p:spPr>
-          <a:xfrm>
-            <a:off x="2462400" y="374400"/>
-            <a:ext cx="43200" cy="43200"/>
-          </a:xfrm>
-          <a:prstGeom prst="ellipse">
-            <a:avLst/>
-          </a:prstGeom>
-          <a:solidFill>
-            <a:srgbClr val="C49645">
-              <a:alpha val="46000"/>
-            </a:srgbClr>
-          </a:solidFill>
-          <a:ln>
-            <a:noFill/>
-          </a:ln>
-        </p:spPr>
-        <p:txBody>
-          <a:bodyPr rtlCol="0" anchor="ctr"/>
-          <a:lstStyle/>
-          <a:p>
-            <a:pPr algn="ctr"/>
-          </a:p>
-        </p:txBody>
-      </p:sp>
-      <p:sp>
-        <p:nvSpPr>
-          <p:cNvPr id="5" name="Oval 4"/>
-          <p:cNvSpPr/>
-          <p:nvPr/>
-        </p:nvSpPr>
-        <p:spPr>
-          <a:xfrm>
-            <a:off x="2462400" y="482400"/>
-            <a:ext cx="43200" cy="43200"/>
-          </a:xfrm>
-          <a:prstGeom prst="ellipse">
-            <a:avLst/>
-          </a:prstGeom>
-          <a:solidFill>
-            <a:srgbClr val="C49645">
-              <a:alpha val="34000"/>
-            </a:srgbClr>
-          </a:solidFill>
-          <a:ln>
-            <a:noFill/>
-          </a:ln>
-        </p:spPr>
-        <p:txBody>
-          <a:bodyPr rtlCol="0" anchor="ctr"/>
-          <a:lstStyle/>
-          <a:p>
-            <a:pPr algn="ctr"/>
-          </a:p>
-        </p:txBody>
-      </p:sp>
-      <p:sp>
-        <p:nvSpPr>
-          <p:cNvPr id="6" name="Oval 5"/>
-          <p:cNvSpPr/>
-          <p:nvPr/>
-        </p:nvSpPr>
-        <p:spPr>
-          <a:xfrm>
-            <a:off x="2570400" y="158400"/>
-            <a:ext cx="43200" cy="43200"/>
-          </a:xfrm>
-          <a:prstGeom prst="ellipse">
-            <a:avLst/>
-          </a:prstGeom>
-          <a:solidFill>
-            <a:srgbClr val="C49645">
-              <a:alpha val="70000"/>
-            </a:srgbClr>
-          </a:solidFill>
-          <a:ln>
-            <a:noFill/>
-          </a:ln>
-        </p:spPr>
-        <p:txBody>
-          <a:bodyPr rtlCol="0" anchor="ctr"/>
-          <a:lstStyle/>
-          <a:p>
-            <a:pPr algn="ctr"/>
-          </a:p>
-        </p:txBody>
-      </p:sp>
-      <p:sp>
-        <p:nvSpPr>
-          <p:cNvPr id="7" name="Oval 6"/>
-          <p:cNvSpPr/>
-          <p:nvPr/>
-        </p:nvSpPr>
-        <p:spPr>
-          <a:xfrm>
-            <a:off x="2570400" y="266400"/>
-            <a:ext cx="43200" cy="43200"/>
-          </a:xfrm>
-          <a:prstGeom prst="ellipse">
-            <a:avLst/>
-          </a:prstGeom>
-          <a:solidFill>
-            <a:srgbClr val="C49645">
-              <a:alpha val="57999"/>
-            </a:srgbClr>
-          </a:solidFill>
-          <a:ln>
-            <a:noFill/>
-          </a:ln>
-        </p:spPr>
-        <p:txBody>
-          <a:bodyPr rtlCol="0" anchor="ctr"/>
-          <a:lstStyle/>
-          <a:p>
-            <a:pPr algn="ctr"/>
-          </a:p>
-        </p:txBody>
-      </p:sp>
-      <p:sp>
-        <p:nvSpPr>
-          <p:cNvPr id="8" name="Oval 7"/>
-          <p:cNvSpPr/>
-          <p:nvPr/>
-        </p:nvSpPr>
-        <p:spPr>
-          <a:xfrm>
-            <a:off x="2570400" y="374400"/>
-            <a:ext cx="43200" cy="43200"/>
-          </a:xfrm>
-          <a:prstGeom prst="ellipse">
-            <a:avLst/>
-          </a:prstGeom>
-          <a:solidFill>
-            <a:srgbClr val="C49645">
-              <a:alpha val="46000"/>
-            </a:srgbClr>
-          </a:solidFill>
-          <a:ln>
-            <a:noFill/>
-          </a:ln>
-        </p:spPr>
-        <p:txBody>
-          <a:bodyPr rtlCol="0" anchor="ctr"/>
-          <a:lstStyle/>
-          <a:p>
-            <a:pPr algn="ctr"/>
-          </a:p>
-        </p:txBody>
-      </p:sp>
-      <p:sp>
-        <p:nvSpPr>
-          <p:cNvPr id="9" name="Oval 8"/>
-          <p:cNvSpPr/>
-          <p:nvPr/>
-        </p:nvSpPr>
-        <p:spPr>
-          <a:xfrm>
-            <a:off x="2570400" y="482400"/>
-            <a:ext cx="43200" cy="43200"/>
-          </a:xfrm>
-          <a:prstGeom prst="ellipse">
-            <a:avLst/>
-          </a:prstGeom>
-          <a:solidFill>
-            <a:srgbClr val="C49645">
-              <a:alpha val="34000"/>
-            </a:srgbClr>
-          </a:solidFill>
-          <a:ln>
-            <a:noFill/>
-          </a:ln>
-        </p:spPr>
-        <p:txBody>
-          <a:bodyPr rtlCol="0" anchor="ctr"/>
-          <a:lstStyle/>
-          <a:p>
-            <a:pPr algn="ctr"/>
-          </a:p>
-        </p:txBody>
-      </p:sp>
-      <p:sp>
-        <p:nvSpPr>
-          <p:cNvPr id="10" name="Oval 9"/>
-          <p:cNvSpPr/>
-          <p:nvPr/>
-        </p:nvSpPr>
-        <p:spPr>
-          <a:xfrm>
-            <a:off x="2678400" y="158400"/>
-            <a:ext cx="43200" cy="43200"/>
-          </a:xfrm>
-          <a:prstGeom prst="ellipse">
-            <a:avLst/>
-          </a:prstGeom>
-          <a:solidFill>
-            <a:srgbClr val="C49645">
-              <a:alpha val="70000"/>
-            </a:srgbClr>
-          </a:solidFill>
-          <a:ln>
-            <a:noFill/>
-          </a:ln>
-        </p:spPr>
-        <p:txBody>
-          <a:bodyPr rtlCol="0" anchor="ctr"/>
-          <a:lstStyle/>
-          <a:p>
-            <a:pPr algn="ctr"/>
-          </a:p>
-        </p:txBody>
-      </p:sp>
-      <p:sp>
-        <p:nvSpPr>
-          <p:cNvPr id="11" name="Oval 10"/>
-          <p:cNvSpPr/>
-          <p:nvPr/>
-        </p:nvSpPr>
-        <p:spPr>
-          <a:xfrm>
-            <a:off x="2678400" y="266400"/>
-            <a:ext cx="43200" cy="43200"/>
-          </a:xfrm>
-          <a:prstGeom prst="ellipse">
-            <a:avLst/>
-          </a:prstGeom>
-          <a:solidFill>
-            <a:srgbClr val="C49645">
-              <a:alpha val="57999"/>
-            </a:srgbClr>
-          </a:solidFill>
-          <a:ln>
-            <a:noFill/>
-          </a:ln>
-        </p:spPr>
-        <p:txBody>
-          <a:bodyPr rtlCol="0" anchor="ctr"/>
-          <a:lstStyle/>
-          <a:p>
-            <a:pPr algn="ctr"/>
-          </a:p>
-        </p:txBody>
-      </p:sp>
-      <p:sp>
-        <p:nvSpPr>
-          <p:cNvPr id="12" name="Oval 11"/>
-          <p:cNvSpPr/>
-          <p:nvPr/>
-        </p:nvSpPr>
-        <p:spPr>
-          <a:xfrm>
-            <a:off x="2678400" y="374400"/>
-            <a:ext cx="43200" cy="43200"/>
-          </a:xfrm>
-          <a:prstGeom prst="ellipse">
-            <a:avLst/>
-          </a:prstGeom>
-          <a:solidFill>
-            <a:srgbClr val="C49645">
-              <a:alpha val="46000"/>
-            </a:srgbClr>
-          </a:solidFill>
-          <a:ln>
-            <a:noFill/>
-          </a:ln>
-        </p:spPr>
-        <p:txBody>
-          <a:bodyPr rtlCol="0" anchor="ctr"/>
-          <a:lstStyle/>
-          <a:p>
-            <a:pPr algn="ctr"/>
-          </a:p>
-        </p:txBody>
-      </p:sp>
-      <p:sp>
-        <p:nvSpPr>
-          <p:cNvPr id="13" name="Oval 12"/>
-          <p:cNvSpPr/>
-          <p:nvPr/>
-        </p:nvSpPr>
-        <p:spPr>
-          <a:xfrm>
-            <a:off x="2678400" y="482400"/>
-            <a:ext cx="43200" cy="43200"/>
-          </a:xfrm>
-          <a:prstGeom prst="ellipse">
-            <a:avLst/>
-          </a:prstGeom>
-          <a:solidFill>
-            <a:srgbClr val="C49645">
-              <a:alpha val="34000"/>
-            </a:srgbClr>
-          </a:solidFill>
-          <a:ln>
-            <a:noFill/>
-          </a:ln>
-        </p:spPr>
-        <p:txBody>
-          <a:bodyPr rtlCol="0" anchor="ctr"/>
-          <a:lstStyle/>
-          <a:p>
-            <a:pPr algn="ctr"/>
-          </a:p>
-        </p:txBody>
-      </p:sp>
-      <p:sp>
-        <p:nvSpPr>
-          <p:cNvPr id="14" name="Oval 13"/>
-          <p:cNvSpPr/>
-          <p:nvPr/>
-        </p:nvSpPr>
-        <p:spPr>
-          <a:xfrm>
-            <a:off x="2786400" y="158400"/>
-            <a:ext cx="43200" cy="43200"/>
-          </a:xfrm>
-          <a:prstGeom prst="ellipse">
-            <a:avLst/>
-          </a:prstGeom>
-          <a:solidFill>
-            <a:srgbClr val="C49645">
-              <a:alpha val="70000"/>
-            </a:srgbClr>
-          </a:solidFill>
-          <a:ln>
-            <a:noFill/>
-          </a:ln>
-        </p:spPr>
-        <p:txBody>
-          <a:bodyPr rtlCol="0" anchor="ctr"/>
-          <a:lstStyle/>
-          <a:p>
-            <a:pPr algn="ctr"/>
-          </a:p>
-        </p:txBody>
-      </p:sp>
-      <p:sp>
-        <p:nvSpPr>
-          <p:cNvPr id="15" name="Oval 14"/>
-          <p:cNvSpPr/>
-          <p:nvPr/>
-        </p:nvSpPr>
-        <p:spPr>
-          <a:xfrm>
-            <a:off x="2786400" y="266400"/>
-            <a:ext cx="43200" cy="43200"/>
-          </a:xfrm>
-          <a:prstGeom prst="ellipse">
-            <a:avLst/>
-          </a:prstGeom>
-          <a:solidFill>
-            <a:srgbClr val="C49645">
-              <a:alpha val="57999"/>
-            </a:srgbClr>
-          </a:solidFill>
-          <a:ln>
-            <a:noFill/>
-          </a:ln>
-        </p:spPr>
-        <p:txBody>
-          <a:bodyPr rtlCol="0" anchor="ctr"/>
-          <a:lstStyle/>
-          <a:p>
-            <a:pPr algn="ctr"/>
-          </a:p>
-        </p:txBody>
-      </p:sp>
-      <p:sp>
-        <p:nvSpPr>
-          <p:cNvPr id="16" name="Oval 15"/>
-          <p:cNvSpPr/>
-          <p:nvPr/>
-        </p:nvSpPr>
-        <p:spPr>
-          <a:xfrm>
-            <a:off x="2786400" y="374400"/>
-            <a:ext cx="43200" cy="43200"/>
-          </a:xfrm>
-          <a:prstGeom prst="ellipse">
-            <a:avLst/>
-          </a:prstGeom>
-          <a:solidFill>
-            <a:srgbClr val="C49645">
-              <a:alpha val="46000"/>
-            </a:srgbClr>
-          </a:solidFill>
-          <a:ln>
-            <a:noFill/>
-          </a:ln>
-        </p:spPr>
-        <p:txBody>
-          <a:bodyPr rtlCol="0" anchor="ctr"/>
-          <a:lstStyle/>
-          <a:p>
-            <a:pPr algn="ctr"/>
-          </a:p>
-        </p:txBody>
-      </p:sp>
-      <p:sp>
-        <p:nvSpPr>
-          <p:cNvPr id="17" name="Oval 16"/>
-          <p:cNvSpPr/>
-          <p:nvPr/>
-        </p:nvSpPr>
-        <p:spPr>
-          <a:xfrm>
-            <a:off x="2786400" y="482400"/>
-            <a:ext cx="43200" cy="43200"/>
-          </a:xfrm>
-          <a:prstGeom prst="ellipse">
-            <a:avLst/>
-          </a:prstGeom>
-          <a:solidFill>
-            <a:srgbClr val="C49645">
-              <a:alpha val="34000"/>
-            </a:srgbClr>
-          </a:solidFill>
-          <a:ln>
-            <a:noFill/>
-          </a:ln>
-        </p:spPr>
-        <p:txBody>
-          <a:bodyPr rtlCol="0" anchor="ctr"/>
-          <a:lstStyle/>
-          <a:p>
-            <a:pPr algn="ctr"/>
-          </a:p>
-        </p:txBody>
-      </p:sp>
-      <p:sp>
-        <p:nvSpPr>
-          <p:cNvPr id="18" name="Oval 17"/>
-          <p:cNvSpPr/>
-          <p:nvPr/>
-        </p:nvSpPr>
-        <p:spPr>
-          <a:xfrm>
-            <a:off x="2894400" y="158400"/>
-            <a:ext cx="43200" cy="43200"/>
-          </a:xfrm>
-          <a:prstGeom prst="ellipse">
-            <a:avLst/>
-          </a:prstGeom>
-          <a:solidFill>
-            <a:srgbClr val="C49645">
-              <a:alpha val="70000"/>
-            </a:srgbClr>
-          </a:solidFill>
-          <a:ln>
-            <a:noFill/>
-          </a:ln>
-        </p:spPr>
-        <p:txBody>
-          <a:bodyPr rtlCol="0" anchor="ctr"/>
-          <a:lstStyle/>
-          <a:p>
-            <a:pPr algn="ctr"/>
-          </a:p>
-        </p:txBody>
-      </p:sp>
-      <p:sp>
-        <p:nvSpPr>
-          <p:cNvPr id="19" name="Oval 18"/>
-          <p:cNvSpPr/>
-          <p:nvPr/>
-        </p:nvSpPr>
-        <p:spPr>
-          <a:xfrm>
-            <a:off x="2894400" y="266400"/>
-            <a:ext cx="43200" cy="43200"/>
-          </a:xfrm>
-          <a:prstGeom prst="ellipse">
-            <a:avLst/>
-          </a:prstGeom>
-          <a:solidFill>
-            <a:srgbClr val="C49645">
-              <a:alpha val="57999"/>
-            </a:srgbClr>
-          </a:solidFill>
-          <a:ln>
-            <a:noFill/>
-          </a:ln>
-        </p:spPr>
-        <p:txBody>
-          <a:bodyPr rtlCol="0" anchor="ctr"/>
-          <a:lstStyle/>
-          <a:p>
-            <a:pPr algn="ctr"/>
-          </a:p>
-        </p:txBody>
-      </p:sp>
-      <p:sp>
-        <p:nvSpPr>
-          <p:cNvPr id="20" name="Oval 19"/>
-          <p:cNvSpPr/>
-          <p:nvPr/>
-        </p:nvSpPr>
-        <p:spPr>
-          <a:xfrm>
-            <a:off x="2894400" y="374400"/>
-            <a:ext cx="43200" cy="43200"/>
-          </a:xfrm>
-          <a:prstGeom prst="ellipse">
-            <a:avLst/>
-          </a:prstGeom>
-          <a:solidFill>
-            <a:srgbClr val="C49645">
-              <a:alpha val="46000"/>
-            </a:srgbClr>
-          </a:solidFill>
-          <a:ln>
-            <a:noFill/>
-          </a:ln>
-        </p:spPr>
-        <p:txBody>
-          <a:bodyPr rtlCol="0" anchor="ctr"/>
-          <a:lstStyle/>
-          <a:p>
-            <a:pPr algn="ctr"/>
-          </a:p>
-        </p:txBody>
-      </p:sp>
-      <p:sp>
-        <p:nvSpPr>
-          <p:cNvPr id="21" name="Oval 20"/>
-          <p:cNvSpPr/>
-          <p:nvPr/>
-        </p:nvSpPr>
-        <p:spPr>
-          <a:xfrm>
-            <a:off x="2894400" y="482400"/>
-            <a:ext cx="43200" cy="43200"/>
-          </a:xfrm>
-          <a:prstGeom prst="ellipse">
-            <a:avLst/>
-          </a:prstGeom>
-          <a:solidFill>
-            <a:srgbClr val="C49645">
-              <a:alpha val="34000"/>
-            </a:srgbClr>
-          </a:solidFill>
-          <a:ln>
-            <a:noFill/>
-          </a:ln>
-        </p:spPr>
-        <p:txBody>
-          <a:bodyPr rtlCol="0" anchor="ctr"/>
-          <a:lstStyle/>
-          <a:p>
-            <a:pPr algn="ctr"/>
-          </a:p>
-        </p:txBody>
-      </p:sp>
-      <p:sp>
-        <p:nvSpPr>
-          <p:cNvPr id="22" name="Rectangle 21"/>
-          <p:cNvSpPr/>
-          <p:nvPr/>
-        </p:nvSpPr>
-        <p:spPr>
-          <a:xfrm>
-            <a:off x="0" y="1663200"/>
-            <a:ext cx="3240000" cy="136800"/>
-          </a:xfrm>
-          <a:prstGeom prst="rect">
-            <a:avLst/>
-          </a:prstGeom>
-          <a:solidFill>
-            <a:srgbClr val="C49645"/>
-          </a:solidFill>
-          <a:ln>
-            <a:noFill/>
-          </a:ln>
-        </p:spPr>
-        <p:txBody>
-          <a:bodyPr rtlCol="0" anchor="ctr"/>
-          <a:lstStyle/>
-          <a:p>
-            <a:pPr algn="ctr"/>
-          </a:p>
-        </p:txBody>
-      </p:sp>
-      <p:sp>
-        <p:nvSpPr>
-          <p:cNvPr id="23" name="Rectangle 22"/>
-          <p:cNvSpPr/>
-          <p:nvPr/>
-        </p:nvSpPr>
-        <p:spPr>
-          <a:xfrm>
-            <a:off x="0" y="1663200"/>
-            <a:ext cx="936000" cy="136800"/>
-          </a:xfrm>
-          <a:prstGeom prst="rect">
-            <a:avLst/>
-          </a:prstGeom>
-          <a:solidFill>
-            <a:srgbClr val="F2E5CF"/>
-          </a:solidFill>
-          <a:ln>
-            <a:noFill/>
-          </a:ln>
-        </p:spPr>
-        <p:txBody>
-          <a:bodyPr rtlCol="0" anchor="ctr"/>
-          <a:lstStyle/>
-          <a:p>
-            <a:pPr algn="ctr"/>
-          </a:p>
-        </p:txBody>
-      </p:sp>
-      <p:sp>
-        <p:nvSpPr>
-          <p:cNvPr id="24" name="텍스트"/>
-          <p:cNvSpPr txBox="1"/>
-          <p:nvPr/>
-        </p:nvSpPr>
-        <p:spPr>
-          <a:xfrm>
-            <a:off x="252000" y="208800"/>
-            <a:ext cx="1800000" cy="100800"/>
+            <a:off x="252000" y="223200"/>
+            <a:ext cx="2016000" cy="133351"/>
           </a:xfrm>
           <a:prstGeom prst="rect">
             <a:avLst/>
@@ -3799,13 +3121,13 @@
           <a:p>
             <a:pPr algn="l">
               <a:lnSpc>
-                <a:spcPts val="1087"/>
+                <a:spcPts val="1015"/>
               </a:lnSpc>
             </a:pPr>
             <a:r>
-              <a:rPr sz="750" b="1" spc="150">
+              <a:rPr sz="700" b="1" spc="200">
                 <a:solidFill>
-                  <a:srgbClr val="807056"/>
+                  <a:srgbClr val="6B7280"/>
                 </a:solidFill>
                 <a:latin typeface="맑은 고딕"/>
                 <a:ea typeface="맑은 고딕"/>
@@ -3817,14 +3139,14 @@
       </p:sp>
       <p:sp>
         <p:nvSpPr>
-          <p:cNvPr id="25" name="텍스트"/>
+          <p:cNvPr id="3" name="텍스트"/>
           <p:cNvSpPr txBox="1"/>
           <p:nvPr/>
         </p:nvSpPr>
         <p:spPr>
           <a:xfrm>
-            <a:off x="252000" y="540000"/>
-            <a:ext cx="2016000" cy="313692"/>
+            <a:off x="252000" y="468000"/>
+            <a:ext cx="2520000" cy="360000"/>
           </a:xfrm>
           <a:prstGeom prst="rect">
             <a:avLst/>
@@ -3839,13 +3161,13 @@
           <a:p>
             <a:pPr algn="l">
               <a:lnSpc>
-                <a:spcPts val="2755"/>
+                <a:spcPts val="3190"/>
               </a:lnSpc>
             </a:pPr>
             <a:r>
-              <a:rPr sz="1900" b="1" spc="50">
+              <a:rPr sz="2200" b="1">
                 <a:solidFill>
-                  <a:srgbClr val="7C5D27"/>
+                  <a:srgbClr val="12151C"/>
                 </a:solidFill>
                 <a:latin typeface="맑은 고딕"/>
                 <a:ea typeface="맑은 고딕"/>
@@ -3857,14 +3179,14 @@
       </p:sp>
       <p:sp>
         <p:nvSpPr>
-          <p:cNvPr id="26" name="텍스트"/>
+          <p:cNvPr id="4" name="텍스트"/>
           <p:cNvSpPr txBox="1"/>
           <p:nvPr/>
         </p:nvSpPr>
         <p:spPr>
           <a:xfrm>
-            <a:off x="252000" y="828000"/>
-            <a:ext cx="2016000" cy="122400"/>
+            <a:off x="252000" y="871200"/>
+            <a:ext cx="2520000" cy="171451"/>
           </a:xfrm>
           <a:prstGeom prst="rect">
             <a:avLst/>
@@ -3879,13 +3201,13 @@
           <a:p>
             <a:pPr algn="l">
               <a:lnSpc>
-                <a:spcPts val="1232"/>
+                <a:spcPts val="1305"/>
               </a:lnSpc>
             </a:pPr>
             <a:r>
-              <a:rPr sz="850" b="1">
+              <a:rPr sz="900" b="0">
                 <a:solidFill>
-                  <a:srgbClr val="937034"/>
+                  <a:srgbClr val="6B7280"/>
                 </a:solidFill>
                 <a:latin typeface="맑은 고딕"/>
                 <a:ea typeface="맑은 고딕"/>
@@ -3897,14 +3219,14 @@
       </p:sp>
       <p:sp>
         <p:nvSpPr>
-          <p:cNvPr id="27" name="텍스트"/>
+          <p:cNvPr id="5" name="텍스트"/>
           <p:cNvSpPr txBox="1"/>
           <p:nvPr/>
         </p:nvSpPr>
         <p:spPr>
           <a:xfrm>
-            <a:off x="252000" y="1108800"/>
-            <a:ext cx="122400" cy="168911"/>
+            <a:off x="252000" y="1216800"/>
+            <a:ext cx="2520000" cy="129541"/>
           </a:xfrm>
           <a:prstGeom prst="rect">
             <a:avLst/>
@@ -3919,32 +3241,61 @@
           <a:p>
             <a:pPr algn="l">
               <a:lnSpc>
-                <a:spcPts val="1015"/>
+                <a:spcPts val="986"/>
               </a:lnSpc>
             </a:pPr>
             <a:r>
-              <a:rPr sz="700" b="1">
+              <a:rPr sz="680" b="0">
                 <a:solidFill>
-                  <a:srgbClr val="937034"/>
+                  <a:srgbClr val="6B7280"/>
                 </a:solidFill>
                 <a:latin typeface="맑은 고딕"/>
                 <a:ea typeface="맑은 고딕"/>
               </a:rPr>
-              <a:t>T</a:t>
-            </a:r>
-          </a:p>
-        </p:txBody>
-      </p:sp>
-      <p:sp>
-        <p:nvSpPr>
-          <p:cNvPr id="28" name="텍스트"/>
+              <a:t>주소를 입력해 주세요</a:t>
+            </a:r>
+          </a:p>
+        </p:txBody>
+      </p:sp>
+      <p:sp>
+        <p:nvSpPr>
+          <p:cNvPr id="6" name="Rectangle 5"/>
+          <p:cNvSpPr/>
+          <p:nvPr/>
+        </p:nvSpPr>
+        <p:spPr>
+          <a:xfrm>
+            <a:off x="0" y="1476000"/>
+            <a:ext cx="3240000" cy="324000"/>
+          </a:xfrm>
+          <a:prstGeom prst="rect">
+            <a:avLst/>
+          </a:prstGeom>
+          <a:solidFill>
+            <a:srgbClr val="00D0E0"/>
+          </a:solidFill>
+          <a:ln>
+            <a:noFill/>
+          </a:ln>
+        </p:spPr>
+        <p:txBody>
+          <a:bodyPr rtlCol="0" anchor="ctr"/>
+          <a:lstStyle/>
+          <a:p>
+            <a:pPr algn="ctr"/>
+          </a:p>
+        </p:txBody>
+      </p:sp>
+      <p:sp>
+        <p:nvSpPr>
+          <p:cNvPr id="7" name="텍스트"/>
           <p:cNvSpPr txBox="1"/>
           <p:nvPr/>
         </p:nvSpPr>
         <p:spPr>
           <a:xfrm>
-            <a:off x="396000" y="1108800"/>
-            <a:ext cx="1584000" cy="168911"/>
+            <a:off x="252000" y="1569600"/>
+            <a:ext cx="1296000" cy="133351"/>
           </a:xfrm>
           <a:prstGeom prst="rect">
             <a:avLst/>
@@ -3963,9 +3314,9 @@
               </a:lnSpc>
             </a:pPr>
             <a:r>
-              <a:rPr sz="700" b="0">
+              <a:rPr sz="700" b="1">
                 <a:solidFill>
-                  <a:srgbClr val="7C5D27"/>
+                  <a:srgbClr val="12151C"/>
                 </a:solidFill>
                 <a:latin typeface="맑은 고딕"/>
                 <a:ea typeface="맑은 고딕"/>
@@ -3977,14 +3328,14 @@
       </p:sp>
       <p:sp>
         <p:nvSpPr>
-          <p:cNvPr id="29" name="텍스트"/>
+          <p:cNvPr id="8" name="텍스트"/>
           <p:cNvSpPr txBox="1"/>
           <p:nvPr/>
         </p:nvSpPr>
         <p:spPr>
           <a:xfrm>
-            <a:off x="252000" y="1277711"/>
-            <a:ext cx="122400" cy="168911"/>
+            <a:off x="1656000" y="1569600"/>
+            <a:ext cx="1368000" cy="133351"/>
           </a:xfrm>
           <a:prstGeom prst="rect">
             <a:avLst/>
@@ -4005,193 +3356,13 @@
             <a:r>
               <a:rPr sz="700" b="1">
                 <a:solidFill>
-                  <a:srgbClr val="937034"/>
-                </a:solidFill>
-                <a:latin typeface="맑은 고딕"/>
-                <a:ea typeface="맑은 고딕"/>
-              </a:rPr>
-              <a:t>E</a:t>
-            </a:r>
-          </a:p>
-        </p:txBody>
-      </p:sp>
-      <p:sp>
-        <p:nvSpPr>
-          <p:cNvPr id="30" name="텍스트"/>
-          <p:cNvSpPr txBox="1"/>
-          <p:nvPr/>
-        </p:nvSpPr>
-        <p:spPr>
-          <a:xfrm>
-            <a:off x="396000" y="1277711"/>
-            <a:ext cx="1584000" cy="168911"/>
-          </a:xfrm>
-          <a:prstGeom prst="rect">
-            <a:avLst/>
-          </a:prstGeom>
-          <a:noFill/>
-        </p:spPr>
-        <p:txBody>
-          <a:bodyPr wrap="square" lIns="0" rIns="0" tIns="0" bIns="0" anchor="t">
-            <a:spAutoFit/>
-          </a:bodyPr>
-          <a:lstStyle/>
-          <a:p>
-            <a:pPr algn="l">
-              <a:lnSpc>
-                <a:spcPts val="1015"/>
-              </a:lnSpc>
-            </a:pPr>
-            <a:r>
-              <a:rPr sz="700" b="0">
-                <a:solidFill>
-                  <a:srgbClr val="7C5D27"/>
+                  <a:srgbClr val="12151C"/>
                 </a:solidFill>
                 <a:latin typeface="맑은 고딕"/>
                 <a:ea typeface="맑은 고딕"/>
               </a:rPr>
               <a:t>name@example.com</a:t>
             </a:r>
-          </a:p>
-        </p:txBody>
-      </p:sp>
-      <p:sp>
-        <p:nvSpPr>
-          <p:cNvPr id="31" name="텍스트"/>
-          <p:cNvSpPr txBox="1"/>
-          <p:nvPr/>
-        </p:nvSpPr>
-        <p:spPr>
-          <a:xfrm>
-            <a:off x="252000" y="1446622"/>
-            <a:ext cx="122400" cy="168911"/>
-          </a:xfrm>
-          <a:prstGeom prst="rect">
-            <a:avLst/>
-          </a:prstGeom>
-          <a:noFill/>
-        </p:spPr>
-        <p:txBody>
-          <a:bodyPr wrap="square" lIns="0" rIns="0" tIns="0" bIns="0" anchor="t">
-            <a:spAutoFit/>
-          </a:bodyPr>
-          <a:lstStyle/>
-          <a:p>
-            <a:pPr algn="l">
-              <a:lnSpc>
-                <a:spcPts val="1015"/>
-              </a:lnSpc>
-            </a:pPr>
-            <a:r>
-              <a:rPr sz="700" b="1">
-                <a:solidFill>
-                  <a:srgbClr val="937034"/>
-                </a:solidFill>
-                <a:latin typeface="맑은 고딕"/>
-                <a:ea typeface="맑은 고딕"/>
-              </a:rPr>
-              <a:t>A</a:t>
-            </a:r>
-          </a:p>
-        </p:txBody>
-      </p:sp>
-      <p:sp>
-        <p:nvSpPr>
-          <p:cNvPr id="32" name="텍스트"/>
-          <p:cNvSpPr txBox="1"/>
-          <p:nvPr/>
-        </p:nvSpPr>
-        <p:spPr>
-          <a:xfrm>
-            <a:off x="396000" y="1446622"/>
-            <a:ext cx="1584000" cy="168911"/>
-          </a:xfrm>
-          <a:prstGeom prst="rect">
-            <a:avLst/>
-          </a:prstGeom>
-          <a:noFill/>
-        </p:spPr>
-        <p:txBody>
-          <a:bodyPr wrap="square" lIns="0" rIns="0" tIns="0" bIns="0" anchor="t">
-            <a:spAutoFit/>
-          </a:bodyPr>
-          <a:lstStyle/>
-          <a:p>
-            <a:pPr algn="l">
-              <a:lnSpc>
-                <a:spcPts val="1015"/>
-              </a:lnSpc>
-            </a:pPr>
-            <a:r>
-              <a:rPr sz="700" b="0">
-                <a:solidFill>
-                  <a:srgbClr val="7C5D27"/>
-                </a:solidFill>
-                <a:latin typeface="맑은 고딕"/>
-                <a:ea typeface="맑은 고딕"/>
-              </a:rPr>
-              <a:t>주소를 입력해 주세요</a:t>
-            </a:r>
-          </a:p>
-        </p:txBody>
-      </p:sp>
-      <p:sp>
-        <p:nvSpPr>
-          <p:cNvPr id="33" name="Oval 32"/>
-          <p:cNvSpPr/>
-          <p:nvPr/>
-        </p:nvSpPr>
-        <p:spPr>
-          <a:xfrm>
-            <a:off x="2828160" y="1078560"/>
-            <a:ext cx="103680" cy="138240"/>
-          </a:xfrm>
-          <a:prstGeom prst="ellipse">
-            <a:avLst/>
-          </a:prstGeom>
-          <a:noFill/>
-          <a:ln w="20160">
-            <a:solidFill>
-              <a:srgbClr val="F2E5CF"/>
-            </a:solidFill>
-          </a:ln>
-        </p:spPr>
-        <p:txBody>
-          <a:bodyPr rtlCol="0" anchor="ctr"/>
-          <a:lstStyle/>
-          <a:p>
-            <a:pPr algn="ctr"/>
-          </a:p>
-        </p:txBody>
-      </p:sp>
-      <p:sp>
-        <p:nvSpPr>
-          <p:cNvPr id="34" name="Rounded Rectangle 33"/>
-          <p:cNvSpPr/>
-          <p:nvPr/>
-        </p:nvSpPr>
-        <p:spPr>
-          <a:xfrm>
-            <a:off x="2770560" y="1159200"/>
-            <a:ext cx="218880" cy="149760"/>
-          </a:xfrm>
-          <a:prstGeom prst="roundRect">
-            <a:avLst>
-              <a:gd name="adj" fmla="val 13461"/>
-            </a:avLst>
-          </a:prstGeom>
-          <a:solidFill>
-            <a:srgbClr val="C49645"/>
-          </a:solidFill>
-          <a:ln>
-            <a:noFill/>
-          </a:ln>
-        </p:spPr>
-        <p:txBody>
-          <a:bodyPr rtlCol="0" anchor="ctr"/>
-          <a:lstStyle/>
-          <a:p>
-            <a:pPr algn="ctr"/>
           </a:p>
         </p:txBody>
       </p:sp>
@@ -4209,7 +3380,7 @@
     <p:bg>
       <p:bgPr>
         <a:solidFill>
-          <a:srgbClr val="FFFFFF"/>
+          <a:srgbClr val="E6FAFC"/>
         </a:solidFill>
         <a:effectLst/>
       </p:bgPr>
@@ -4223,246 +3394,14 @@
       <p:grpSpPr/>
       <p:sp>
         <p:nvSpPr>
-          <p:cNvPr id="2" name="Freeform 1"/>
-          <p:cNvSpPr/>
-          <p:nvPr/>
-        </p:nvSpPr>
-        <p:spPr>
-          <a:xfrm>
-            <a:off x="2016000" y="576000"/>
-            <a:ext cx="1224000" cy="1224000"/>
-          </a:xfrm>
-          <a:custGeom>
-            <a:avLst/>
-            <a:gdLst/>
-            <a:ahLst/>
-            <a:cxnLst/>
-            <a:rect l="l" t="t" r="r" b="b"/>
-            <a:pathLst>
-              <a:path w="1224000" h="1224000">
-                <a:moveTo>
-                  <a:pt x="1224000" y="1224000"/>
-                </a:moveTo>
-                <a:lnTo>
-                  <a:pt x="0" y="1224000"/>
-                </a:lnTo>
-                <a:lnTo>
-                  <a:pt x="7696" y="1086955"/>
-                </a:lnTo>
-                <a:lnTo>
-                  <a:pt x="30688" y="951634"/>
-                </a:lnTo>
-                <a:lnTo>
-                  <a:pt x="68687" y="819738"/>
-                </a:lnTo>
-                <a:lnTo>
-                  <a:pt x="121214" y="692926"/>
-                </a:lnTo>
-                <a:lnTo>
-                  <a:pt x="187610" y="572793"/>
-                </a:lnTo>
-                <a:lnTo>
-                  <a:pt x="267038" y="460848"/>
-                </a:lnTo>
-                <a:lnTo>
-                  <a:pt x="358501" y="358501"/>
-                </a:lnTo>
-                <a:lnTo>
-                  <a:pt x="460848" y="267038"/>
-                </a:lnTo>
-                <a:lnTo>
-                  <a:pt x="572793" y="187610"/>
-                </a:lnTo>
-                <a:lnTo>
-                  <a:pt x="692926" y="121214"/>
-                </a:lnTo>
-                <a:lnTo>
-                  <a:pt x="819738" y="68687"/>
-                </a:lnTo>
-                <a:lnTo>
-                  <a:pt x="951634" y="30688"/>
-                </a:lnTo>
-                <a:lnTo>
-                  <a:pt x="1086955" y="7696"/>
-                </a:lnTo>
-                <a:lnTo>
-                  <a:pt x="1224000" y="0"/>
-                </a:lnTo>
-                <a:close/>
-              </a:path>
-            </a:pathLst>
-          </a:custGeom>
-          <a:solidFill>
-            <a:srgbClr val="C49645"/>
-          </a:solidFill>
-          <a:ln>
-            <a:noFill/>
-          </a:ln>
-        </p:spPr>
-        <p:txBody>
-          <a:bodyPr rtlCol="0" anchor="ctr"/>
-          <a:lstStyle/>
-          <a:p>
-            <a:pPr algn="ctr"/>
-          </a:p>
-        </p:txBody>
-      </p:sp>
-      <p:sp>
-        <p:nvSpPr>
-          <p:cNvPr id="3" name="Freeform 2"/>
-          <p:cNvSpPr/>
-          <p:nvPr/>
-        </p:nvSpPr>
-        <p:spPr>
-          <a:xfrm>
-            <a:off x="2520000" y="1080000"/>
-            <a:ext cx="720000" cy="720000"/>
-          </a:xfrm>
-          <a:custGeom>
-            <a:avLst/>
-            <a:gdLst/>
-            <a:ahLst/>
-            <a:cxnLst/>
-            <a:rect l="l" t="t" r="r" b="b"/>
-            <a:pathLst>
-              <a:path w="720000" h="720000">
-                <a:moveTo>
-                  <a:pt x="720000" y="720000"/>
-                </a:moveTo>
-                <a:lnTo>
-                  <a:pt x="0" y="720000"/>
-                </a:lnTo>
-                <a:lnTo>
-                  <a:pt x="4527" y="639386"/>
-                </a:lnTo>
-                <a:lnTo>
-                  <a:pt x="18052" y="559785"/>
-                </a:lnTo>
-                <a:lnTo>
-                  <a:pt x="40404" y="482199"/>
-                </a:lnTo>
-                <a:lnTo>
-                  <a:pt x="71302" y="407604"/>
-                </a:lnTo>
-                <a:lnTo>
-                  <a:pt x="110359" y="336937"/>
-                </a:lnTo>
-                <a:lnTo>
-                  <a:pt x="157081" y="271087"/>
-                </a:lnTo>
-                <a:lnTo>
-                  <a:pt x="210883" y="210883"/>
-                </a:lnTo>
-                <a:lnTo>
-                  <a:pt x="271087" y="157081"/>
-                </a:lnTo>
-                <a:lnTo>
-                  <a:pt x="336937" y="110359"/>
-                </a:lnTo>
-                <a:lnTo>
-                  <a:pt x="407604" y="71302"/>
-                </a:lnTo>
-                <a:lnTo>
-                  <a:pt x="482199" y="40404"/>
-                </a:lnTo>
-                <a:lnTo>
-                  <a:pt x="559785" y="18052"/>
-                </a:lnTo>
-                <a:lnTo>
-                  <a:pt x="639386" y="4527"/>
-                </a:lnTo>
-                <a:lnTo>
-                  <a:pt x="720000" y="0"/>
-                </a:lnTo>
-                <a:close/>
-              </a:path>
-            </a:pathLst>
-          </a:custGeom>
-          <a:solidFill>
-            <a:srgbClr val="F2E5CF"/>
-          </a:solidFill>
-          <a:ln>
-            <a:noFill/>
-          </a:ln>
-        </p:spPr>
-        <p:txBody>
-          <a:bodyPr rtlCol="0" anchor="ctr"/>
-          <a:lstStyle/>
-          <a:p>
-            <a:pPr algn="ctr"/>
-          </a:p>
-        </p:txBody>
-      </p:sp>
-      <p:sp>
-        <p:nvSpPr>
-          <p:cNvPr id="4" name="Oval 3"/>
-          <p:cNvSpPr/>
-          <p:nvPr/>
-        </p:nvSpPr>
-        <p:spPr>
-          <a:xfrm>
-            <a:off x="2834640" y="1380240"/>
-            <a:ext cx="90720" cy="120960"/>
-          </a:xfrm>
-          <a:prstGeom prst="ellipse">
-            <a:avLst/>
-          </a:prstGeom>
-          <a:noFill/>
-          <a:ln w="17640">
-            <a:solidFill>
-              <a:srgbClr val="808080"/>
-            </a:solidFill>
-          </a:ln>
-        </p:spPr>
-        <p:txBody>
-          <a:bodyPr rtlCol="0" anchor="ctr"/>
-          <a:lstStyle/>
-          <a:p>
-            <a:pPr algn="ctr"/>
-          </a:p>
-        </p:txBody>
-      </p:sp>
-      <p:sp>
-        <p:nvSpPr>
-          <p:cNvPr id="5" name="Rounded Rectangle 4"/>
-          <p:cNvSpPr/>
-          <p:nvPr/>
-        </p:nvSpPr>
-        <p:spPr>
-          <a:xfrm>
-            <a:off x="2784240" y="1450800"/>
-            <a:ext cx="191520" cy="131040"/>
-          </a:xfrm>
-          <a:prstGeom prst="roundRect">
-            <a:avLst>
-              <a:gd name="adj" fmla="val 13461"/>
-            </a:avLst>
-          </a:prstGeom>
-          <a:solidFill>
-            <a:srgbClr val="FFFFFF"/>
-          </a:solidFill>
-          <a:ln>
-            <a:noFill/>
-          </a:ln>
-        </p:spPr>
-        <p:txBody>
-          <a:bodyPr rtlCol="0" anchor="ctr"/>
-          <a:lstStyle/>
-          <a:p>
-            <a:pPr algn="ctr"/>
-          </a:p>
-        </p:txBody>
-      </p:sp>
-      <p:sp>
-        <p:nvSpPr>
-          <p:cNvPr id="6" name="텍스트"/>
+          <p:cNvPr id="2" name="텍스트"/>
           <p:cNvSpPr txBox="1"/>
           <p:nvPr/>
         </p:nvSpPr>
         <p:spPr>
           <a:xfrm>
             <a:off x="252000" y="324000"/>
-            <a:ext cx="1944000" cy="720000"/>
+            <a:ext cx="2520000" cy="792000"/>
           </a:xfrm>
           <a:prstGeom prst="rect">
             <a:avLst/>
@@ -4477,49 +3416,61 @@
           <a:p>
             <a:pPr algn="l">
               <a:lnSpc>
-                <a:spcPts val="1739"/>
+                <a:spcPts val="1884"/>
               </a:lnSpc>
             </a:pPr>
             <a:r>
-              <a:rPr sz="1200" b="1">
+              <a:rPr sz="1300" b="1">
                 <a:solidFill>
-                  <a:srgbClr val="7C5D27"/>
+                  <a:srgbClr val="12151C"/>
                 </a:solidFill>
-                <a:latin typeface="바탕"/>
-                <a:ea typeface="바탕"/>
+                <a:latin typeface="맑은 고딕"/>
+                <a:ea typeface="맑은 고딕"/>
               </a:rPr>
-              <a:t>사소한 불편도</a:t>
-            </a:r>
-          </a:p>
-          <a:p>
-            <a:pPr algn="l">
-              <a:lnSpc>
-                <a:spcPts val="1739"/>
-              </a:lnSpc>
-            </a:pPr>
-            <a:r>
-              <a:rPr sz="1200" b="1">
-                <a:solidFill>
-                  <a:srgbClr val="7C5D27"/>
-                </a:solidFill>
-                <a:latin typeface="바탕"/>
-                <a:ea typeface="바탕"/>
-              </a:rPr>
-              <a:t>놓치지 않겠습니다</a:t>
-            </a:r>
-          </a:p>
-        </p:txBody>
-      </p:sp>
-      <p:sp>
-        <p:nvSpPr>
-          <p:cNvPr id="7" name="텍스트"/>
+              <a:t>사소한 불편도 놓치지 않겠습니다</a:t>
+            </a:r>
+          </a:p>
+        </p:txBody>
+      </p:sp>
+      <p:sp>
+        <p:nvSpPr>
+          <p:cNvPr id="3" name="Rectangle 2"/>
+          <p:cNvSpPr/>
+          <p:nvPr/>
+        </p:nvSpPr>
+        <p:spPr>
+          <a:xfrm>
+            <a:off x="0" y="1476000"/>
+            <a:ext cx="3240000" cy="324000"/>
+          </a:xfrm>
+          <a:prstGeom prst="rect">
+            <a:avLst/>
+          </a:prstGeom>
+          <a:solidFill>
+            <a:srgbClr val="00D0E0"/>
+          </a:solidFill>
+          <a:ln>
+            <a:noFill/>
+          </a:ln>
+        </p:spPr>
+        <p:txBody>
+          <a:bodyPr rtlCol="0" anchor="ctr"/>
+          <a:lstStyle/>
+          <a:p>
+            <a:pPr algn="ctr"/>
+          </a:p>
+        </p:txBody>
+      </p:sp>
+      <p:sp>
+        <p:nvSpPr>
+          <p:cNvPr id="4" name="텍스트"/>
           <p:cNvSpPr txBox="1"/>
           <p:nvPr/>
         </p:nvSpPr>
         <p:spPr>
           <a:xfrm>
-            <a:off x="252000" y="1476000"/>
-            <a:ext cx="1440000" cy="108000"/>
+            <a:off x="252000" y="1569600"/>
+            <a:ext cx="1872000" cy="142876"/>
           </a:xfrm>
           <a:prstGeom prst="rect">
             <a:avLst/>
@@ -4540,13 +3491,104 @@
             <a:r>
               <a:rPr sz="750" b="1" spc="200">
                 <a:solidFill>
-                  <a:srgbClr val="807056"/>
+                  <a:srgbClr val="12151C"/>
                 </a:solidFill>
                 <a:latin typeface="맑은 고딕"/>
                 <a:ea typeface="맑은 고딕"/>
               </a:rPr>
               <a:t>상호명</a:t>
             </a:r>
+          </a:p>
+        </p:txBody>
+      </p:sp>
+      <p:sp>
+        <p:nvSpPr>
+          <p:cNvPr id="5" name="Oval 4"/>
+          <p:cNvSpPr/>
+          <p:nvPr/>
+        </p:nvSpPr>
+        <p:spPr>
+          <a:xfrm>
+            <a:off x="2714400" y="1616400"/>
+            <a:ext cx="43200" cy="43200"/>
+          </a:xfrm>
+          <a:prstGeom prst="ellipse">
+            <a:avLst/>
+          </a:prstGeom>
+          <a:solidFill>
+            <a:srgbClr val="12151C"/>
+          </a:solidFill>
+          <a:ln>
+            <a:noFill/>
+          </a:ln>
+        </p:spPr>
+        <p:txBody>
+          <a:bodyPr rtlCol="0" anchor="ctr"/>
+          <a:lstStyle/>
+          <a:p>
+            <a:pPr algn="ctr"/>
+          </a:p>
+        </p:txBody>
+      </p:sp>
+      <p:sp>
+        <p:nvSpPr>
+          <p:cNvPr id="6" name="Oval 5"/>
+          <p:cNvSpPr/>
+          <p:nvPr/>
+        </p:nvSpPr>
+        <p:spPr>
+          <a:xfrm>
+            <a:off x="2822400" y="1616400"/>
+            <a:ext cx="43200" cy="43200"/>
+          </a:xfrm>
+          <a:prstGeom prst="ellipse">
+            <a:avLst/>
+          </a:prstGeom>
+          <a:solidFill>
+            <a:srgbClr val="12151C">
+              <a:alpha val="50000"/>
+            </a:srgbClr>
+          </a:solidFill>
+          <a:ln>
+            <a:noFill/>
+          </a:ln>
+        </p:spPr>
+        <p:txBody>
+          <a:bodyPr rtlCol="0" anchor="ctr"/>
+          <a:lstStyle/>
+          <a:p>
+            <a:pPr algn="ctr"/>
+          </a:p>
+        </p:txBody>
+      </p:sp>
+      <p:sp>
+        <p:nvSpPr>
+          <p:cNvPr id="7" name="Oval 6"/>
+          <p:cNvSpPr/>
+          <p:nvPr/>
+        </p:nvSpPr>
+        <p:spPr>
+          <a:xfrm>
+            <a:off x="2930400" y="1616400"/>
+            <a:ext cx="43200" cy="43200"/>
+          </a:xfrm>
+          <a:prstGeom prst="ellipse">
+            <a:avLst/>
+          </a:prstGeom>
+          <a:solidFill>
+            <a:srgbClr val="12151C">
+              <a:alpha val="50000"/>
+            </a:srgbClr>
+          </a:solidFill>
+          <a:ln>
+            <a:noFill/>
+          </a:ln>
+        </p:spPr>
+        <p:txBody>
+          <a:bodyPr rtlCol="0" anchor="ctr"/>
+          <a:lstStyle/>
+          <a:p>
+            <a:pPr algn="ctr"/>
           </a:p>
         </p:txBody>
       </p:sp>

--- a/public/fun/cards/life/life-30.pptx
+++ b/public/fun/cards/life/life-30.pptx
@@ -3105,8 +3105,8 @@
         </p:nvSpPr>
         <p:spPr>
           <a:xfrm>
-            <a:off x="252000" y="223200"/>
-            <a:ext cx="2016000" cy="133351"/>
+            <a:off x="252000" y="252000"/>
+            <a:ext cx="1512000" cy="123826"/>
           </a:xfrm>
           <a:prstGeom prst="rect">
             <a:avLst/>
@@ -3121,11 +3121,11 @@
           <a:p>
             <a:pPr algn="l">
               <a:lnSpc>
-                <a:spcPts val="1015"/>
+                <a:spcPts val="942"/>
               </a:lnSpc>
             </a:pPr>
             <a:r>
-              <a:rPr sz="700" b="1" spc="200">
+              <a:rPr sz="650" b="1" spc="220">
                 <a:solidFill>
                   <a:srgbClr val="6B7280"/>
                 </a:solidFill>
@@ -3137,16 +3137,37 @@
           </a:p>
         </p:txBody>
       </p:sp>
-      <p:sp>
-        <p:nvSpPr>
-          <p:cNvPr id="3" name="텍스트"/>
+      <p:cxnSp>
+        <p:nvCxnSpPr>
+          <p:cNvPr id="3" name="Connector 2"/>
+          <p:cNvCxnSpPr/>
+          <p:nvPr/>
+        </p:nvCxnSpPr>
+        <p:spPr>
+          <a:xfrm>
+            <a:off x="252000" y="388800"/>
+            <a:ext cx="2736000" cy="0"/>
+          </a:xfrm>
+          <a:prstGeom prst="line">
+            <a:avLst/>
+          </a:prstGeom>
+          <a:ln w="3600">
+            <a:solidFill>
+              <a:srgbClr val="E3E5E9"/>
+            </a:solidFill>
+          </a:ln>
+        </p:spPr>
+      </p:cxnSp>
+      <p:sp>
+        <p:nvSpPr>
+          <p:cNvPr id="4" name="텍스트"/>
           <p:cNvSpPr txBox="1"/>
           <p:nvPr/>
         </p:nvSpPr>
         <p:spPr>
           <a:xfrm>
-            <a:off x="252000" y="468000"/>
-            <a:ext cx="2520000" cy="360000"/>
+            <a:off x="252000" y="576000"/>
+            <a:ext cx="1800000" cy="237600"/>
           </a:xfrm>
           <a:prstGeom prst="rect">
             <a:avLst/>
@@ -3161,11 +3182,11 @@
           <a:p>
             <a:pPr algn="l">
               <a:lnSpc>
-                <a:spcPts val="3190"/>
+                <a:spcPts val="1957"/>
               </a:lnSpc>
             </a:pPr>
             <a:r>
-              <a:rPr sz="2200" b="1">
+              <a:rPr sz="1350" b="1" spc="120">
                 <a:solidFill>
                   <a:srgbClr val="12151C"/>
                 </a:solidFill>
@@ -3179,14 +3200,14 @@
       </p:sp>
       <p:sp>
         <p:nvSpPr>
-          <p:cNvPr id="4" name="텍스트"/>
+          <p:cNvPr id="5" name="텍스트"/>
           <p:cNvSpPr txBox="1"/>
           <p:nvPr/>
         </p:nvSpPr>
         <p:spPr>
           <a:xfrm>
-            <a:off x="252000" y="871200"/>
-            <a:ext cx="2520000" cy="171451"/>
+            <a:off x="252000" y="828000"/>
+            <a:ext cx="1800000" cy="133351"/>
           </a:xfrm>
           <a:prstGeom prst="rect">
             <a:avLst/>
@@ -3201,11 +3222,11 @@
           <a:p>
             <a:pPr algn="l">
               <a:lnSpc>
-                <a:spcPts val="1305"/>
+                <a:spcPts val="1015"/>
               </a:lnSpc>
             </a:pPr>
             <a:r>
-              <a:rPr sz="900" b="0">
+              <a:rPr sz="700" b="0" spc="60">
                 <a:solidFill>
                   <a:srgbClr val="6B7280"/>
                 </a:solidFill>
@@ -3219,14 +3240,14 @@
       </p:sp>
       <p:sp>
         <p:nvSpPr>
-          <p:cNvPr id="5" name="텍스트"/>
+          <p:cNvPr id="6" name="텍스트"/>
           <p:cNvSpPr txBox="1"/>
           <p:nvPr/>
         </p:nvSpPr>
         <p:spPr>
           <a:xfrm>
-            <a:off x="252000" y="1216800"/>
-            <a:ext cx="2520000" cy="129541"/>
+            <a:off x="252000" y="1036800"/>
+            <a:ext cx="2520000" cy="123826"/>
           </a:xfrm>
           <a:prstGeom prst="rect">
             <a:avLst/>
@@ -3241,11 +3262,11 @@
           <a:p>
             <a:pPr algn="l">
               <a:lnSpc>
-                <a:spcPts val="986"/>
+                <a:spcPts val="942"/>
               </a:lnSpc>
             </a:pPr>
             <a:r>
-              <a:rPr sz="680" b="0">
+              <a:rPr sz="650" b="0">
                 <a:solidFill>
                   <a:srgbClr val="6B7280"/>
                 </a:solidFill>
@@ -3259,14 +3280,14 @@
       </p:sp>
       <p:sp>
         <p:nvSpPr>
-          <p:cNvPr id="6" name="Rectangle 5"/>
+          <p:cNvPr id="7" name="Rectangle 6"/>
           <p:cNvSpPr/>
           <p:nvPr/>
         </p:nvSpPr>
         <p:spPr>
           <a:xfrm>
-            <a:off x="0" y="1476000"/>
-            <a:ext cx="3240000" cy="324000"/>
+            <a:off x="0" y="1339200"/>
+            <a:ext cx="3240000" cy="460800"/>
           </a:xfrm>
           <a:prstGeom prst="rect">
             <a:avLst/>
@@ -3288,14 +3309,14 @@
       </p:sp>
       <p:sp>
         <p:nvSpPr>
-          <p:cNvPr id="7" name="텍스트"/>
+          <p:cNvPr id="8" name="텍스트"/>
           <p:cNvSpPr txBox="1"/>
           <p:nvPr/>
         </p:nvSpPr>
         <p:spPr>
           <a:xfrm>
-            <a:off x="252000" y="1569600"/>
-            <a:ext cx="1296000" cy="133351"/>
+            <a:off x="252000" y="1476000"/>
+            <a:ext cx="936000" cy="91441"/>
           </a:xfrm>
           <a:prstGeom prst="rect">
             <a:avLst/>
@@ -3310,11 +3331,53 @@
           <a:p>
             <a:pPr algn="l">
               <a:lnSpc>
-                <a:spcPts val="1015"/>
+                <a:spcPts val="696"/>
               </a:lnSpc>
             </a:pPr>
             <a:r>
-              <a:rPr sz="700" b="1">
+              <a:rPr sz="480" b="1" spc="140">
+                <a:solidFill>
+                  <a:srgbClr val="12151C">
+                    <a:alpha val="70000"/>
+                  </a:srgbClr>
+                </a:solidFill>
+                <a:latin typeface="맑은 고딕"/>
+                <a:ea typeface="맑은 고딕"/>
+              </a:rPr>
+              <a:t>TEL</a:t>
+            </a:r>
+          </a:p>
+        </p:txBody>
+      </p:sp>
+      <p:sp>
+        <p:nvSpPr>
+          <p:cNvPr id="9" name="텍스트"/>
+          <p:cNvSpPr txBox="1"/>
+          <p:nvPr/>
+        </p:nvSpPr>
+        <p:spPr>
+          <a:xfrm>
+            <a:off x="252000" y="1576800"/>
+            <a:ext cx="936000" cy="123826"/>
+          </a:xfrm>
+          <a:prstGeom prst="rect">
+            <a:avLst/>
+          </a:prstGeom>
+          <a:noFill/>
+        </p:spPr>
+        <p:txBody>
+          <a:bodyPr wrap="square" lIns="0" rIns="0" tIns="0" bIns="0" anchor="t">
+            <a:spAutoFit/>
+          </a:bodyPr>
+          <a:lstStyle/>
+          <a:p>
+            <a:pPr algn="l">
+              <a:lnSpc>
+                <a:spcPts val="942"/>
+              </a:lnSpc>
+            </a:pPr>
+            <a:r>
+              <a:rPr sz="650" b="1">
                 <a:solidFill>
                   <a:srgbClr val="12151C"/>
                 </a:solidFill>
@@ -3328,14 +3391,14 @@
       </p:sp>
       <p:sp>
         <p:nvSpPr>
-          <p:cNvPr id="8" name="텍스트"/>
+          <p:cNvPr id="10" name="텍스트"/>
           <p:cNvSpPr txBox="1"/>
           <p:nvPr/>
         </p:nvSpPr>
         <p:spPr>
           <a:xfrm>
-            <a:off x="1656000" y="1569600"/>
-            <a:ext cx="1368000" cy="133351"/>
+            <a:off x="1188000" y="1476000"/>
+            <a:ext cx="1080000" cy="91441"/>
           </a:xfrm>
           <a:prstGeom prst="rect">
             <a:avLst/>
@@ -3350,11 +3413,53 @@
           <a:p>
             <a:pPr algn="l">
               <a:lnSpc>
-                <a:spcPts val="1015"/>
+                <a:spcPts val="696"/>
               </a:lnSpc>
             </a:pPr>
             <a:r>
-              <a:rPr sz="700" b="1">
+              <a:rPr sz="480" b="1" spc="140">
+                <a:solidFill>
+                  <a:srgbClr val="12151C">
+                    <a:alpha val="70000"/>
+                  </a:srgbClr>
+                </a:solidFill>
+                <a:latin typeface="맑은 고딕"/>
+                <a:ea typeface="맑은 고딕"/>
+              </a:rPr>
+              <a:t>MAIL</a:t>
+            </a:r>
+          </a:p>
+        </p:txBody>
+      </p:sp>
+      <p:sp>
+        <p:nvSpPr>
+          <p:cNvPr id="11" name="텍스트"/>
+          <p:cNvSpPr txBox="1"/>
+          <p:nvPr/>
+        </p:nvSpPr>
+        <p:spPr>
+          <a:xfrm>
+            <a:off x="1188000" y="1576800"/>
+            <a:ext cx="1080000" cy="123826"/>
+          </a:xfrm>
+          <a:prstGeom prst="rect">
+            <a:avLst/>
+          </a:prstGeom>
+          <a:noFill/>
+        </p:spPr>
+        <p:txBody>
+          <a:bodyPr wrap="square" lIns="0" rIns="0" tIns="0" bIns="0" anchor="t">
+            <a:spAutoFit/>
+          </a:bodyPr>
+          <a:lstStyle/>
+          <a:p>
+            <a:pPr algn="l">
+              <a:lnSpc>
+                <a:spcPts val="942"/>
+              </a:lnSpc>
+            </a:pPr>
+            <a:r>
+              <a:rPr sz="650" b="1">
                 <a:solidFill>
                   <a:srgbClr val="12151C"/>
                 </a:solidFill>
@@ -3366,6 +3471,27 @@
           </a:p>
         </p:txBody>
       </p:sp>
+      <p:cxnSp>
+        <p:nvCxnSpPr>
+          <p:cNvPr id="12" name="Connector 11"/>
+          <p:cNvCxnSpPr/>
+          <p:nvPr/>
+        </p:nvCxnSpPr>
+        <p:spPr>
+          <a:xfrm>
+            <a:off x="1108800" y="1468800"/>
+            <a:ext cx="0" cy="208800"/>
+          </a:xfrm>
+          <a:prstGeom prst="line">
+            <a:avLst/>
+          </a:prstGeom>
+          <a:ln w="3600">
+            <a:solidFill>
+              <a:srgbClr val="12151C"/>
+            </a:solidFill>
+          </a:ln>
+        </p:spPr>
+      </p:cxnSp>
     </p:spTree>
   </p:cSld>
   <p:clrMapOvr>
@@ -3400,8 +3526,8 @@
         </p:nvSpPr>
         <p:spPr>
           <a:xfrm>
-            <a:off x="252000" y="324000"/>
-            <a:ext cx="2520000" cy="792000"/>
+            <a:off x="252000" y="252000"/>
+            <a:ext cx="1080000" cy="99061"/>
           </a:xfrm>
           <a:prstGeom prst="rect">
             <a:avLst/>
@@ -3416,18 +3542,18 @@
           <a:p>
             <a:pPr algn="l">
               <a:lnSpc>
-                <a:spcPts val="1884"/>
+                <a:spcPts val="754"/>
               </a:lnSpc>
             </a:pPr>
             <a:r>
-              <a:rPr sz="1300" b="1">
+              <a:rPr sz="520" b="1" spc="240">
                 <a:solidFill>
-                  <a:srgbClr val="12151C"/>
+                  <a:srgbClr val="0B5C66"/>
                 </a:solidFill>
                 <a:latin typeface="맑은 고딕"/>
                 <a:ea typeface="맑은 고딕"/>
               </a:rPr>
-              <a:t>사소한 불편도 놓치지 않겠습니다</a:t>
+              <a:t>취급 품목</a:t>
             </a:r>
           </a:p>
         </p:txBody>
@@ -3440,8 +3566,8 @@
         </p:nvSpPr>
         <p:spPr>
           <a:xfrm>
-            <a:off x="0" y="1476000"/>
-            <a:ext cx="3240000" cy="324000"/>
+            <a:off x="252000" y="352800"/>
+            <a:ext cx="108000" cy="14400"/>
           </a:xfrm>
           <a:prstGeom prst="rect">
             <a:avLst/>
@@ -3461,16 +3587,37 @@
           </a:p>
         </p:txBody>
       </p:sp>
-      <p:sp>
-        <p:nvSpPr>
-          <p:cNvPr id="4" name="텍스트"/>
+      <p:cxnSp>
+        <p:nvCxnSpPr>
+          <p:cNvPr id="4" name="Connector 3"/>
+          <p:cNvCxnSpPr/>
+          <p:nvPr/>
+        </p:nvCxnSpPr>
+        <p:spPr>
+          <a:xfrm>
+            <a:off x="252000" y="468000"/>
+            <a:ext cx="1512000" cy="0"/>
+          </a:xfrm>
+          <a:prstGeom prst="line">
+            <a:avLst/>
+          </a:prstGeom>
+          <a:ln w="3600">
+            <a:solidFill>
+              <a:srgbClr val="B8F2F6"/>
+            </a:solidFill>
+          </a:ln>
+        </p:spPr>
+      </p:cxnSp>
+      <p:sp>
+        <p:nvSpPr>
+          <p:cNvPr id="5" name="텍스트"/>
           <p:cNvSpPr txBox="1"/>
           <p:nvPr/>
         </p:nvSpPr>
         <p:spPr>
           <a:xfrm>
-            <a:off x="252000" y="1569600"/>
-            <a:ext cx="1872000" cy="142876"/>
+            <a:off x="252000" y="511200"/>
+            <a:ext cx="1260000" cy="133351"/>
           </a:xfrm>
           <a:prstGeom prst="rect">
             <a:avLst/>
@@ -3485,41 +3632,246 @@
           <a:p>
             <a:pPr algn="l">
               <a:lnSpc>
-                <a:spcPts val="1087"/>
+                <a:spcPts val="1015"/>
               </a:lnSpc>
             </a:pPr>
             <a:r>
-              <a:rPr sz="750" b="1" spc="200">
+              <a:rPr sz="700" b="0">
                 <a:solidFill>
                   <a:srgbClr val="12151C"/>
                 </a:solidFill>
                 <a:latin typeface="맑은 고딕"/>
                 <a:ea typeface="맑은 고딕"/>
               </a:rPr>
-              <a:t>상호명</a:t>
-            </a:r>
-          </a:p>
-        </p:txBody>
-      </p:sp>
-      <p:sp>
-        <p:nvSpPr>
-          <p:cNvPr id="5" name="Oval 4"/>
+              <a:t>세탁 · 수선</a:t>
+            </a:r>
+          </a:p>
+        </p:txBody>
+      </p:sp>
+      <p:cxnSp>
+        <p:nvCxnSpPr>
+          <p:cNvPr id="6" name="Connector 5"/>
+          <p:cNvCxnSpPr/>
+          <p:nvPr/>
+        </p:nvCxnSpPr>
+        <p:spPr>
+          <a:xfrm>
+            <a:off x="252000" y="655200"/>
+            <a:ext cx="1512000" cy="0"/>
+          </a:xfrm>
+          <a:prstGeom prst="line">
+            <a:avLst/>
+          </a:prstGeom>
+          <a:ln w="3600">
+            <a:solidFill>
+              <a:srgbClr val="B8F2F6"/>
+            </a:solidFill>
+          </a:ln>
+        </p:spPr>
+      </p:cxnSp>
+      <p:sp>
+        <p:nvSpPr>
+          <p:cNvPr id="7" name="텍스트"/>
+          <p:cNvSpPr txBox="1"/>
+          <p:nvPr/>
+        </p:nvSpPr>
+        <p:spPr>
+          <a:xfrm>
+            <a:off x="252000" y="698400"/>
+            <a:ext cx="1260000" cy="133351"/>
+          </a:xfrm>
+          <a:prstGeom prst="rect">
+            <a:avLst/>
+          </a:prstGeom>
+          <a:noFill/>
+        </p:spPr>
+        <p:txBody>
+          <a:bodyPr wrap="square" lIns="0" rIns="0" tIns="0" bIns="0" anchor="t">
+            <a:spAutoFit/>
+          </a:bodyPr>
+          <a:lstStyle/>
+          <a:p>
+            <a:pPr algn="l">
+              <a:lnSpc>
+                <a:spcPts val="1015"/>
+              </a:lnSpc>
+            </a:pPr>
+            <a:r>
+              <a:rPr sz="700" b="0">
+                <a:solidFill>
+                  <a:srgbClr val="12151C"/>
+                </a:solidFill>
+                <a:latin typeface="맑은 고딕"/>
+                <a:ea typeface="맑은 고딕"/>
+              </a:rPr>
+              <a:t>인테리어</a:t>
+            </a:r>
+          </a:p>
+        </p:txBody>
+      </p:sp>
+      <p:cxnSp>
+        <p:nvCxnSpPr>
+          <p:cNvPr id="8" name="Connector 7"/>
+          <p:cNvCxnSpPr/>
+          <p:nvPr/>
+        </p:nvCxnSpPr>
+        <p:spPr>
+          <a:xfrm>
+            <a:off x="252000" y="842400"/>
+            <a:ext cx="1512000" cy="0"/>
+          </a:xfrm>
+          <a:prstGeom prst="line">
+            <a:avLst/>
+          </a:prstGeom>
+          <a:ln w="3600">
+            <a:solidFill>
+              <a:srgbClr val="B8F2F6"/>
+            </a:solidFill>
+          </a:ln>
+        </p:spPr>
+      </p:cxnSp>
+      <p:sp>
+        <p:nvSpPr>
+          <p:cNvPr id="9" name="텍스트"/>
+          <p:cNvSpPr txBox="1"/>
+          <p:nvPr/>
+        </p:nvSpPr>
+        <p:spPr>
+          <a:xfrm>
+            <a:off x="252000" y="885600"/>
+            <a:ext cx="1260000" cy="133351"/>
+          </a:xfrm>
+          <a:prstGeom prst="rect">
+            <a:avLst/>
+          </a:prstGeom>
+          <a:noFill/>
+        </p:spPr>
+        <p:txBody>
+          <a:bodyPr wrap="square" lIns="0" rIns="0" tIns="0" bIns="0" anchor="t">
+            <a:spAutoFit/>
+          </a:bodyPr>
+          <a:lstStyle/>
+          <a:p>
+            <a:pPr algn="l">
+              <a:lnSpc>
+                <a:spcPts val="1015"/>
+              </a:lnSpc>
+            </a:pPr>
+            <a:r>
+              <a:rPr sz="700" b="0">
+                <a:solidFill>
+                  <a:srgbClr val="12151C"/>
+                </a:solidFill>
+                <a:latin typeface="맑은 고딕"/>
+                <a:ea typeface="맑은 고딕"/>
+              </a:rPr>
+              <a:t>도배 · 장판</a:t>
+            </a:r>
+          </a:p>
+        </p:txBody>
+      </p:sp>
+      <p:cxnSp>
+        <p:nvCxnSpPr>
+          <p:cNvPr id="10" name="Connector 9"/>
+          <p:cNvCxnSpPr/>
+          <p:nvPr/>
+        </p:nvCxnSpPr>
+        <p:spPr>
+          <a:xfrm>
+            <a:off x="252000" y="1029600"/>
+            <a:ext cx="1512000" cy="0"/>
+          </a:xfrm>
+          <a:prstGeom prst="line">
+            <a:avLst/>
+          </a:prstGeom>
+          <a:ln w="3600">
+            <a:solidFill>
+              <a:srgbClr val="B8F2F6"/>
+            </a:solidFill>
+          </a:ln>
+        </p:spPr>
+      </p:cxnSp>
+      <p:sp>
+        <p:nvSpPr>
+          <p:cNvPr id="11" name="텍스트"/>
+          <p:cNvSpPr txBox="1"/>
+          <p:nvPr/>
+        </p:nvSpPr>
+        <p:spPr>
+          <a:xfrm>
+            <a:off x="252000" y="1072800"/>
+            <a:ext cx="1260000" cy="133351"/>
+          </a:xfrm>
+          <a:prstGeom prst="rect">
+            <a:avLst/>
+          </a:prstGeom>
+          <a:noFill/>
+        </p:spPr>
+        <p:txBody>
+          <a:bodyPr wrap="square" lIns="0" rIns="0" tIns="0" bIns="0" anchor="t">
+            <a:spAutoFit/>
+          </a:bodyPr>
+          <a:lstStyle/>
+          <a:p>
+            <a:pPr algn="l">
+              <a:lnSpc>
+                <a:spcPts val="1015"/>
+              </a:lnSpc>
+            </a:pPr>
+            <a:r>
+              <a:rPr sz="700" b="0">
+                <a:solidFill>
+                  <a:srgbClr val="12151C"/>
+                </a:solidFill>
+                <a:latin typeface="맑은 고딕"/>
+                <a:ea typeface="맑은 고딕"/>
+              </a:rPr>
+              <a:t>이사 정리</a:t>
+            </a:r>
+          </a:p>
+        </p:txBody>
+      </p:sp>
+      <p:cxnSp>
+        <p:nvCxnSpPr>
+          <p:cNvPr id="12" name="Connector 11"/>
+          <p:cNvCxnSpPr/>
+          <p:nvPr/>
+        </p:nvCxnSpPr>
+        <p:spPr>
+          <a:xfrm>
+            <a:off x="252000" y="1216800"/>
+            <a:ext cx="1512000" cy="0"/>
+          </a:xfrm>
+          <a:prstGeom prst="line">
+            <a:avLst/>
+          </a:prstGeom>
+          <a:ln w="3600">
+            <a:solidFill>
+              <a:srgbClr val="B8F2F6"/>
+            </a:solidFill>
+          </a:ln>
+        </p:spPr>
+      </p:cxnSp>
+      <p:sp>
+        <p:nvSpPr>
+          <p:cNvPr id="13" name="Rectangle 12"/>
           <p:cNvSpPr/>
           <p:nvPr/>
         </p:nvSpPr>
         <p:spPr>
           <a:xfrm>
-            <a:off x="2714400" y="1616400"/>
-            <a:ext cx="43200" cy="43200"/>
-          </a:xfrm>
-          <a:prstGeom prst="ellipse">
+            <a:off x="2196000" y="396000"/>
+            <a:ext cx="720000" cy="720000"/>
+          </a:xfrm>
+          <a:prstGeom prst="rect">
             <a:avLst/>
           </a:prstGeom>
-          <a:solidFill>
-            <a:srgbClr val="12151C"/>
-          </a:solidFill>
-          <a:ln>
-            <a:noFill/>
+          <a:noFill/>
+          <a:ln w="4320">
+            <a:solidFill>
+              <a:srgbClr val="0B5C66"/>
+            </a:solidFill>
+            <a:prstDash val="dash"/>
           </a:ln>
         </p:spPr>
         <p:txBody>
@@ -3532,63 +3884,121 @@
       </p:sp>
       <p:sp>
         <p:nvSpPr>
-          <p:cNvPr id="6" name="Oval 5"/>
-          <p:cNvSpPr/>
+          <p:cNvPr id="14" name="텍스트"/>
+          <p:cNvSpPr txBox="1"/>
           <p:nvPr/>
         </p:nvSpPr>
         <p:spPr>
           <a:xfrm>
-            <a:off x="2822400" y="1616400"/>
-            <a:ext cx="43200" cy="43200"/>
-          </a:xfrm>
-          <a:prstGeom prst="ellipse">
+            <a:off x="2196000" y="396000"/>
+            <a:ext cx="720000" cy="720000"/>
+          </a:xfrm>
+          <a:prstGeom prst="rect">
             <a:avLst/>
           </a:prstGeom>
-          <a:solidFill>
-            <a:srgbClr val="12151C">
-              <a:alpha val="50000"/>
-            </a:srgbClr>
-          </a:solidFill>
-          <a:ln>
-            <a:noFill/>
-          </a:ln>
-        </p:spPr>
-        <p:txBody>
-          <a:bodyPr rtlCol="0" anchor="ctr"/>
-          <a:lstStyle/>
-          <a:p>
-            <a:pPr algn="ctr"/>
-          </a:p>
-        </p:txBody>
-      </p:sp>
-      <p:sp>
-        <p:nvSpPr>
-          <p:cNvPr id="7" name="Oval 6"/>
-          <p:cNvSpPr/>
+          <a:noFill/>
+        </p:spPr>
+        <p:txBody>
+          <a:bodyPr wrap="square" lIns="0" rIns="0" tIns="0" bIns="0" anchor="ctr">
+            <a:spAutoFit/>
+          </a:bodyPr>
+          <a:lstStyle/>
+          <a:p>
+            <a:pPr algn="ctr">
+              <a:lnSpc>
+                <a:spcPts val="1305"/>
+              </a:lnSpc>
+            </a:pPr>
+            <a:r>
+              <a:rPr sz="900" b="1">
+                <a:solidFill>
+                  <a:srgbClr val="0B5C66"/>
+                </a:solidFill>
+                <a:latin typeface="맑은 고딕"/>
+                <a:ea typeface="맑은 고딕"/>
+              </a:rPr>
+              <a:t>QR</a:t>
+            </a:r>
+          </a:p>
+        </p:txBody>
+      </p:sp>
+      <p:sp>
+        <p:nvSpPr>
+          <p:cNvPr id="15" name="텍스트"/>
+          <p:cNvSpPr txBox="1"/>
           <p:nvPr/>
         </p:nvSpPr>
         <p:spPr>
           <a:xfrm>
-            <a:off x="2930400" y="1616400"/>
-            <a:ext cx="43200" cy="43200"/>
-          </a:xfrm>
-          <a:prstGeom prst="ellipse">
+            <a:off x="2196000" y="1209600"/>
+            <a:ext cx="720000" cy="118111"/>
+          </a:xfrm>
+          <a:prstGeom prst="rect">
             <a:avLst/>
           </a:prstGeom>
-          <a:solidFill>
-            <a:srgbClr val="12151C">
-              <a:alpha val="50000"/>
-            </a:srgbClr>
-          </a:solidFill>
-          <a:ln>
-            <a:noFill/>
-          </a:ln>
-        </p:spPr>
-        <p:txBody>
-          <a:bodyPr rtlCol="0" anchor="ctr"/>
-          <a:lstStyle/>
-          <a:p>
-            <a:pPr algn="ctr"/>
+          <a:noFill/>
+        </p:spPr>
+        <p:txBody>
+          <a:bodyPr wrap="square" lIns="0" rIns="0" tIns="0" bIns="0" anchor="t">
+            <a:spAutoFit/>
+          </a:bodyPr>
+          <a:lstStyle/>
+          <a:p>
+            <a:pPr algn="ctr">
+              <a:lnSpc>
+                <a:spcPts val="899"/>
+              </a:lnSpc>
+            </a:pPr>
+            <a:r>
+              <a:rPr sz="620" b="0">
+                <a:solidFill>
+                  <a:srgbClr val="12151C"/>
+                </a:solidFill>
+                <a:latin typeface="맑은 고딕"/>
+                <a:ea typeface="맑은 고딕"/>
+              </a:rPr>
+              <a:t>@채널아이디</a:t>
+            </a:r>
+          </a:p>
+        </p:txBody>
+      </p:sp>
+      <p:sp>
+        <p:nvSpPr>
+          <p:cNvPr id="16" name="텍스트"/>
+          <p:cNvSpPr txBox="1"/>
+          <p:nvPr/>
+        </p:nvSpPr>
+        <p:spPr>
+          <a:xfrm>
+            <a:off x="2196000" y="1353600"/>
+            <a:ext cx="720000" cy="118111"/>
+          </a:xfrm>
+          <a:prstGeom prst="rect">
+            <a:avLst/>
+          </a:prstGeom>
+          <a:noFill/>
+        </p:spPr>
+        <p:txBody>
+          <a:bodyPr wrap="square" lIns="0" rIns="0" tIns="0" bIns="0" anchor="t">
+            <a:spAutoFit/>
+          </a:bodyPr>
+          <a:lstStyle/>
+          <a:p>
+            <a:pPr algn="ctr">
+              <a:lnSpc>
+                <a:spcPts val="899"/>
+              </a:lnSpc>
+            </a:pPr>
+            <a:r>
+              <a:rPr sz="620" b="0">
+                <a:solidFill>
+                  <a:srgbClr val="0B5C66"/>
+                </a:solidFill>
+                <a:latin typeface="맑은 고딕"/>
+                <a:ea typeface="맑은 고딕"/>
+              </a:rPr>
+              <a:t>매일 10:00 – 20:00</a:t>
+            </a:r>
           </a:p>
         </p:txBody>
       </p:sp>
